--- a/class/cloud_infra_mgmt/12주차_Jenkins_CICD심화/01_강의자료/3차시_PollSCM자동빌드연동.pptx
+++ b/class/cloud_infra_mgmt/12주차_Jenkins_CICD심화/01_강의자료/3차시_PollSCM자동빌드연동.pptx
@@ -10207,7 +10207,7 @@
               </a:lnSpc>
             </a:pPr>
             <a:r>
-              <a:rPr sz="1500" b="1">
+              <a:rPr sz="1700" b="1">
                 <a:solidFill>
                   <a:srgbClr val="0D9488"/>
                 </a:solidFill>
@@ -10216,7 +10216,7 @@
               <a:t>●  </a:t>
             </a:r>
             <a:r>
-              <a:rPr sz="1500" b="0">
+              <a:rPr sz="1700" b="0">
                 <a:solidFill>
                   <a:srgbClr val="222733"/>
                 </a:solidFill>
@@ -10232,7 +10232,7 @@
               </a:lnSpc>
             </a:pPr>
             <a:r>
-              <a:rPr sz="1500" b="1">
+              <a:rPr sz="1700" b="1">
                 <a:solidFill>
                   <a:srgbClr val="0D9488"/>
                 </a:solidFill>
@@ -10241,7 +10241,7 @@
               <a:t>●  </a:t>
             </a:r>
             <a:r>
-              <a:rPr sz="1500" b="0">
+              <a:rPr sz="1700" b="0">
                 <a:solidFill>
                   <a:srgbClr val="222733"/>
                 </a:solidFill>
@@ -10257,7 +10257,7 @@
               </a:lnSpc>
             </a:pPr>
             <a:r>
-              <a:rPr sz="1500" b="1">
+              <a:rPr sz="1700" b="1">
                 <a:solidFill>
                   <a:srgbClr val="0D9488"/>
                 </a:solidFill>
@@ -10266,7 +10266,7 @@
               <a:t>●  </a:t>
             </a:r>
             <a:r>
-              <a:rPr sz="1500" b="0">
+              <a:rPr sz="1700" b="0">
                 <a:solidFill>
                   <a:srgbClr val="222733"/>
                 </a:solidFill>

--- a/class/cloud_infra_mgmt/12주차_Jenkins_CICD심화/01_강의자료/3차시_PollSCM자동빌드연동.pptx
+++ b/class/cloud_infra_mgmt/12주차_Jenkins_CICD심화/01_강의자료/3차시_PollSCM자동빌드연동.pptx
@@ -5336,7 +5336,7 @@
           <a:p>
             <a:pPr>
               <a:lnSpc>
-                <a:spcPct val="115000"/>
+                <a:spcPct val="149500"/>
               </a:lnSpc>
             </a:pPr>
             <a:r>
@@ -5361,7 +5361,7 @@
           <a:p>
             <a:pPr>
               <a:lnSpc>
-                <a:spcPct val="115000"/>
+                <a:spcPct val="149500"/>
               </a:lnSpc>
             </a:pPr>
             <a:r>
@@ -5386,7 +5386,7 @@
           <a:p>
             <a:pPr>
               <a:lnSpc>
-                <a:spcPct val="115000"/>
+                <a:spcPct val="149500"/>
               </a:lnSpc>
             </a:pPr>
             <a:r>
@@ -5777,7 +5777,7 @@
           <a:p>
             <a:pPr>
               <a:lnSpc>
-                <a:spcPct val="115000"/>
+                <a:spcPct val="149500"/>
               </a:lnSpc>
             </a:pPr>
             <a:r>
@@ -5802,7 +5802,7 @@
           <a:p>
             <a:pPr>
               <a:lnSpc>
-                <a:spcPct val="115000"/>
+                <a:spcPct val="149500"/>
               </a:lnSpc>
             </a:pPr>
             <a:r>
@@ -5827,7 +5827,7 @@
           <a:p>
             <a:pPr>
               <a:lnSpc>
-                <a:spcPct val="115000"/>
+                <a:spcPct val="149500"/>
               </a:lnSpc>
             </a:pPr>
             <a:r>
@@ -5852,7 +5852,7 @@
           <a:p>
             <a:pPr>
               <a:lnSpc>
-                <a:spcPct val="115000"/>
+                <a:spcPct val="149500"/>
               </a:lnSpc>
             </a:pPr>
             <a:r>
@@ -7360,16 +7360,104 @@
       </p:sp>
       <p:sp>
         <p:nvSpPr>
-          <p:cNvPr id="7" name="Isosceles Triangle 6"/>
+          <p:cNvPr id="7" name="Rectangle 6"/>
           <p:cNvSpPr/>
           <p:nvPr/>
         </p:nvSpPr>
         <p:spPr>
-          <a:xfrm rot="5400000">
-            <a:off x="3495751" y="1673352"/>
-            <a:ext cx="146304" cy="146304"/>
-          </a:xfrm>
-          <a:prstGeom prst="triangle">
+          <a:xfrm>
+            <a:off x="5096865" y="1730959"/>
+            <a:ext cx="1995220" cy="31089"/>
+          </a:xfrm>
+          <a:prstGeom prst="rect">
+            <a:avLst/>
+          </a:prstGeom>
+          <a:solidFill>
+            <a:srgbClr val="14B8A6"/>
+          </a:solidFill>
+          <a:ln>
+            <a:noFill/>
+          </a:ln>
+          <a:effectLst/>
+        </p:spPr>
+        <p:style>
+          <a:lnRef idx="1">
+            <a:schemeClr val="accent1"/>
+          </a:lnRef>
+          <a:fillRef idx="3">
+            <a:schemeClr val="accent1"/>
+          </a:fillRef>
+          <a:effectRef idx="2">
+            <a:schemeClr val="accent1"/>
+          </a:effectRef>
+          <a:fontRef idx="minor">
+            <a:schemeClr val="lt1"/>
+          </a:fontRef>
+        </p:style>
+        <p:txBody>
+          <a:bodyPr rtlCol="0" anchor="ctr"/>
+          <a:lstStyle/>
+          <a:p>
+            <a:pPr algn="ctr"/>
+          </a:p>
+        </p:txBody>
+      </p:sp>
+      <p:sp>
+        <p:nvSpPr>
+          <p:cNvPr id="8" name="Rectangle 7"/>
+          <p:cNvSpPr/>
+          <p:nvPr/>
+        </p:nvSpPr>
+        <p:spPr>
+          <a:xfrm>
+            <a:off x="7622438" y="1730959"/>
+            <a:ext cx="1995220" cy="31089"/>
+          </a:xfrm>
+          <a:prstGeom prst="rect">
+            <a:avLst/>
+          </a:prstGeom>
+          <a:solidFill>
+            <a:srgbClr val="14B8A6"/>
+          </a:solidFill>
+          <a:ln>
+            <a:noFill/>
+          </a:ln>
+          <a:effectLst/>
+        </p:spPr>
+        <p:style>
+          <a:lnRef idx="1">
+            <a:schemeClr val="accent1"/>
+          </a:lnRef>
+          <a:fillRef idx="3">
+            <a:schemeClr val="accent1"/>
+          </a:fillRef>
+          <a:effectRef idx="2">
+            <a:schemeClr val="accent1"/>
+          </a:effectRef>
+          <a:fontRef idx="minor">
+            <a:schemeClr val="lt1"/>
+          </a:fontRef>
+        </p:style>
+        <p:txBody>
+          <a:bodyPr rtlCol="0" anchor="ctr"/>
+          <a:lstStyle/>
+          <a:p>
+            <a:pPr algn="ctr"/>
+          </a:p>
+        </p:txBody>
+      </p:sp>
+      <p:sp>
+        <p:nvSpPr>
+          <p:cNvPr id="9" name="Oval 8"/>
+          <p:cNvSpPr/>
+          <p:nvPr/>
+        </p:nvSpPr>
+        <p:spPr>
+          <a:xfrm>
+            <a:off x="2040940" y="1481328"/>
+            <a:ext cx="530352" cy="530352"/>
+          </a:xfrm>
+          <a:prstGeom prst="ellipse">
             <a:avLst/>
           </a:prstGeom>
           <a:solidFill>
@@ -7404,227 +7492,7 @@
       </p:sp>
       <p:sp>
         <p:nvSpPr>
-          <p:cNvPr id="8" name="Rectangle 7"/>
-          <p:cNvSpPr/>
-          <p:nvPr/>
-        </p:nvSpPr>
-        <p:spPr>
-          <a:xfrm>
-            <a:off x="5096865" y="1730959"/>
-            <a:ext cx="1995220" cy="31089"/>
-          </a:xfrm>
-          <a:prstGeom prst="rect">
-            <a:avLst/>
-          </a:prstGeom>
-          <a:solidFill>
-            <a:srgbClr val="14B8A6"/>
-          </a:solidFill>
-          <a:ln>
-            <a:noFill/>
-          </a:ln>
-          <a:effectLst/>
-        </p:spPr>
-        <p:style>
-          <a:lnRef idx="1">
-            <a:schemeClr val="accent1"/>
-          </a:lnRef>
-          <a:fillRef idx="3">
-            <a:schemeClr val="accent1"/>
-          </a:fillRef>
-          <a:effectRef idx="2">
-            <a:schemeClr val="accent1"/>
-          </a:effectRef>
-          <a:fontRef idx="minor">
-            <a:schemeClr val="lt1"/>
-          </a:fontRef>
-        </p:style>
-        <p:txBody>
-          <a:bodyPr rtlCol="0" anchor="ctr"/>
-          <a:lstStyle/>
-          <a:p>
-            <a:pPr algn="ctr"/>
-          </a:p>
-        </p:txBody>
-      </p:sp>
-      <p:sp>
-        <p:nvSpPr>
-          <p:cNvPr id="9" name="Isosceles Triangle 8"/>
-          <p:cNvSpPr/>
-          <p:nvPr/>
-        </p:nvSpPr>
-        <p:spPr>
-          <a:xfrm rot="5400000">
-            <a:off x="6021324" y="1673352"/>
-            <a:ext cx="146304" cy="146304"/>
-          </a:xfrm>
-          <a:prstGeom prst="triangle">
-            <a:avLst/>
-          </a:prstGeom>
-          <a:solidFill>
-            <a:srgbClr val="0D9488"/>
-          </a:solidFill>
-          <a:ln>
-            <a:noFill/>
-          </a:ln>
-          <a:effectLst/>
-        </p:spPr>
-        <p:style>
-          <a:lnRef idx="1">
-            <a:schemeClr val="accent1"/>
-          </a:lnRef>
-          <a:fillRef idx="3">
-            <a:schemeClr val="accent1"/>
-          </a:fillRef>
-          <a:effectRef idx="2">
-            <a:schemeClr val="accent1"/>
-          </a:effectRef>
-          <a:fontRef idx="minor">
-            <a:schemeClr val="lt1"/>
-          </a:fontRef>
-        </p:style>
-        <p:txBody>
-          <a:bodyPr rtlCol="0" anchor="ctr"/>
-          <a:lstStyle/>
-          <a:p>
-            <a:pPr algn="ctr"/>
-          </a:p>
-        </p:txBody>
-      </p:sp>
-      <p:sp>
-        <p:nvSpPr>
-          <p:cNvPr id="10" name="Rectangle 9"/>
-          <p:cNvSpPr/>
-          <p:nvPr/>
-        </p:nvSpPr>
-        <p:spPr>
-          <a:xfrm>
-            <a:off x="7622438" y="1730959"/>
-            <a:ext cx="1995220" cy="31089"/>
-          </a:xfrm>
-          <a:prstGeom prst="rect">
-            <a:avLst/>
-          </a:prstGeom>
-          <a:solidFill>
-            <a:srgbClr val="14B8A6"/>
-          </a:solidFill>
-          <a:ln>
-            <a:noFill/>
-          </a:ln>
-          <a:effectLst/>
-        </p:spPr>
-        <p:style>
-          <a:lnRef idx="1">
-            <a:schemeClr val="accent1"/>
-          </a:lnRef>
-          <a:fillRef idx="3">
-            <a:schemeClr val="accent1"/>
-          </a:fillRef>
-          <a:effectRef idx="2">
-            <a:schemeClr val="accent1"/>
-          </a:effectRef>
-          <a:fontRef idx="minor">
-            <a:schemeClr val="lt1"/>
-          </a:fontRef>
-        </p:style>
-        <p:txBody>
-          <a:bodyPr rtlCol="0" anchor="ctr"/>
-          <a:lstStyle/>
-          <a:p>
-            <a:pPr algn="ctr"/>
-          </a:p>
-        </p:txBody>
-      </p:sp>
-      <p:sp>
-        <p:nvSpPr>
-          <p:cNvPr id="11" name="Isosceles Triangle 10"/>
-          <p:cNvSpPr/>
-          <p:nvPr/>
-        </p:nvSpPr>
-        <p:spPr>
-          <a:xfrm rot="5400000">
-            <a:off x="8546896" y="1673352"/>
-            <a:ext cx="146304" cy="146304"/>
-          </a:xfrm>
-          <a:prstGeom prst="triangle">
-            <a:avLst/>
-          </a:prstGeom>
-          <a:solidFill>
-            <a:srgbClr val="0D9488"/>
-          </a:solidFill>
-          <a:ln>
-            <a:noFill/>
-          </a:ln>
-          <a:effectLst/>
-        </p:spPr>
-        <p:style>
-          <a:lnRef idx="1">
-            <a:schemeClr val="accent1"/>
-          </a:lnRef>
-          <a:fillRef idx="3">
-            <a:schemeClr val="accent1"/>
-          </a:fillRef>
-          <a:effectRef idx="2">
-            <a:schemeClr val="accent1"/>
-          </a:effectRef>
-          <a:fontRef idx="minor">
-            <a:schemeClr val="lt1"/>
-          </a:fontRef>
-        </p:style>
-        <p:txBody>
-          <a:bodyPr rtlCol="0" anchor="ctr"/>
-          <a:lstStyle/>
-          <a:p>
-            <a:pPr algn="ctr"/>
-          </a:p>
-        </p:txBody>
-      </p:sp>
-      <p:sp>
-        <p:nvSpPr>
-          <p:cNvPr id="12" name="Oval 11"/>
-          <p:cNvSpPr/>
-          <p:nvPr/>
-        </p:nvSpPr>
-        <p:spPr>
-          <a:xfrm>
-            <a:off x="2040940" y="1481328"/>
-            <a:ext cx="530352" cy="530352"/>
-          </a:xfrm>
-          <a:prstGeom prst="ellipse">
-            <a:avLst/>
-          </a:prstGeom>
-          <a:solidFill>
-            <a:srgbClr val="0D9488"/>
-          </a:solidFill>
-          <a:ln>
-            <a:noFill/>
-          </a:ln>
-          <a:effectLst/>
-        </p:spPr>
-        <p:style>
-          <a:lnRef idx="1">
-            <a:schemeClr val="accent1"/>
-          </a:lnRef>
-          <a:fillRef idx="3">
-            <a:schemeClr val="accent1"/>
-          </a:fillRef>
-          <a:effectRef idx="2">
-            <a:schemeClr val="accent1"/>
-          </a:effectRef>
-          <a:fontRef idx="minor">
-            <a:schemeClr val="lt1"/>
-          </a:fontRef>
-        </p:style>
-        <p:txBody>
-          <a:bodyPr rtlCol="0" anchor="ctr"/>
-          <a:lstStyle/>
-          <a:p>
-            <a:pPr algn="ctr"/>
-          </a:p>
-        </p:txBody>
-      </p:sp>
-      <p:sp>
-        <p:nvSpPr>
-          <p:cNvPr id="13" name="TextBox 12"/>
+          <p:cNvPr id="10" name="TextBox 9"/>
           <p:cNvSpPr txBox="1"/>
           <p:nvPr/>
         </p:nvSpPr>
@@ -7659,7 +7527,7 @@
       </p:sp>
       <p:sp>
         <p:nvSpPr>
-          <p:cNvPr id="14" name="Rounded Rectangle 13"/>
+          <p:cNvPr id="11" name="Rounded Rectangle 10"/>
           <p:cNvSpPr/>
           <p:nvPr/>
         </p:nvSpPr>
@@ -7707,7 +7575,7 @@
       </p:sp>
       <p:sp>
         <p:nvSpPr>
-          <p:cNvPr id="15" name="TextBox 14"/>
+          <p:cNvPr id="12" name="TextBox 11"/>
           <p:cNvSpPr txBox="1"/>
           <p:nvPr/>
         </p:nvSpPr>
@@ -7742,7 +7610,7 @@
       </p:sp>
       <p:sp>
         <p:nvSpPr>
-          <p:cNvPr id="16" name="TextBox 15"/>
+          <p:cNvPr id="13" name="TextBox 12"/>
           <p:cNvSpPr txBox="1"/>
           <p:nvPr/>
         </p:nvSpPr>
@@ -7781,7 +7649,7 @@
       </p:sp>
       <p:sp>
         <p:nvSpPr>
-          <p:cNvPr id="17" name="Oval 16"/>
+          <p:cNvPr id="14" name="Oval 13"/>
           <p:cNvSpPr/>
           <p:nvPr/>
         </p:nvSpPr>
@@ -7825,7 +7693,7 @@
       </p:sp>
       <p:sp>
         <p:nvSpPr>
-          <p:cNvPr id="18" name="TextBox 17"/>
+          <p:cNvPr id="15" name="TextBox 14"/>
           <p:cNvSpPr txBox="1"/>
           <p:nvPr/>
         </p:nvSpPr>
@@ -7860,7 +7728,7 @@
       </p:sp>
       <p:sp>
         <p:nvSpPr>
-          <p:cNvPr id="19" name="Rounded Rectangle 18"/>
+          <p:cNvPr id="16" name="Rounded Rectangle 15"/>
           <p:cNvSpPr/>
           <p:nvPr/>
         </p:nvSpPr>
@@ -7908,7 +7776,7 @@
       </p:sp>
       <p:sp>
         <p:nvSpPr>
-          <p:cNvPr id="20" name="TextBox 19"/>
+          <p:cNvPr id="17" name="TextBox 16"/>
           <p:cNvSpPr txBox="1"/>
           <p:nvPr/>
         </p:nvSpPr>
@@ -7943,7 +7811,7 @@
       </p:sp>
       <p:sp>
         <p:nvSpPr>
-          <p:cNvPr id="21" name="TextBox 20"/>
+          <p:cNvPr id="18" name="TextBox 17"/>
           <p:cNvSpPr txBox="1"/>
           <p:nvPr/>
         </p:nvSpPr>
@@ -7982,7 +7850,7 @@
       </p:sp>
       <p:sp>
         <p:nvSpPr>
-          <p:cNvPr id="22" name="Oval 21"/>
+          <p:cNvPr id="19" name="Oval 18"/>
           <p:cNvSpPr/>
           <p:nvPr/>
         </p:nvSpPr>
@@ -8026,7 +7894,7 @@
       </p:sp>
       <p:sp>
         <p:nvSpPr>
-          <p:cNvPr id="23" name="TextBox 22"/>
+          <p:cNvPr id="20" name="TextBox 19"/>
           <p:cNvSpPr txBox="1"/>
           <p:nvPr/>
         </p:nvSpPr>
@@ -8061,7 +7929,7 @@
       </p:sp>
       <p:sp>
         <p:nvSpPr>
-          <p:cNvPr id="24" name="Rounded Rectangle 23"/>
+          <p:cNvPr id="21" name="Rounded Rectangle 20"/>
           <p:cNvSpPr/>
           <p:nvPr/>
         </p:nvSpPr>
@@ -8109,7 +7977,7 @@
       </p:sp>
       <p:sp>
         <p:nvSpPr>
-          <p:cNvPr id="25" name="TextBox 24"/>
+          <p:cNvPr id="22" name="TextBox 21"/>
           <p:cNvSpPr txBox="1"/>
           <p:nvPr/>
         </p:nvSpPr>
@@ -8144,7 +8012,7 @@
       </p:sp>
       <p:sp>
         <p:nvSpPr>
-          <p:cNvPr id="26" name="TextBox 25"/>
+          <p:cNvPr id="23" name="TextBox 22"/>
           <p:cNvSpPr txBox="1"/>
           <p:nvPr/>
         </p:nvSpPr>
@@ -8183,7 +8051,7 @@
       </p:sp>
       <p:sp>
         <p:nvSpPr>
-          <p:cNvPr id="27" name="Oval 26"/>
+          <p:cNvPr id="24" name="Oval 23"/>
           <p:cNvSpPr/>
           <p:nvPr/>
         </p:nvSpPr>
@@ -8227,7 +8095,7 @@
       </p:sp>
       <p:sp>
         <p:nvSpPr>
-          <p:cNvPr id="28" name="TextBox 27"/>
+          <p:cNvPr id="25" name="TextBox 24"/>
           <p:cNvSpPr txBox="1"/>
           <p:nvPr/>
         </p:nvSpPr>
@@ -8262,7 +8130,7 @@
       </p:sp>
       <p:sp>
         <p:nvSpPr>
-          <p:cNvPr id="29" name="Rounded Rectangle 28"/>
+          <p:cNvPr id="26" name="Rounded Rectangle 25"/>
           <p:cNvSpPr/>
           <p:nvPr/>
         </p:nvSpPr>
@@ -8310,7 +8178,7 @@
       </p:sp>
       <p:sp>
         <p:nvSpPr>
-          <p:cNvPr id="30" name="TextBox 29"/>
+          <p:cNvPr id="27" name="TextBox 26"/>
           <p:cNvSpPr txBox="1"/>
           <p:nvPr/>
         </p:nvSpPr>
@@ -8345,7 +8213,7 @@
       </p:sp>
       <p:sp>
         <p:nvSpPr>
-          <p:cNvPr id="31" name="TextBox 30"/>
+          <p:cNvPr id="28" name="TextBox 27"/>
           <p:cNvSpPr txBox="1"/>
           <p:nvPr/>
         </p:nvSpPr>
@@ -8384,7 +8252,7 @@
       </p:sp>
       <p:sp>
         <p:nvSpPr>
-          <p:cNvPr id="32" name="TextBox 31"/>
+          <p:cNvPr id="29" name="TextBox 28"/>
           <p:cNvSpPr txBox="1"/>
           <p:nvPr/>
         </p:nvSpPr>
@@ -8419,7 +8287,7 @@
       </p:sp>
       <p:sp>
         <p:nvSpPr>
-          <p:cNvPr id="33" name="TextBox 32"/>
+          <p:cNvPr id="30" name="TextBox 29"/>
           <p:cNvSpPr txBox="1"/>
           <p:nvPr/>
         </p:nvSpPr>
@@ -8454,7 +8322,7 @@
       </p:sp>
       <p:sp>
         <p:nvSpPr>
-          <p:cNvPr id="34" name="Rectangle 33"/>
+          <p:cNvPr id="31" name="Rectangle 30"/>
           <p:cNvSpPr/>
           <p:nvPr/>
         </p:nvSpPr>
@@ -8978,7 +8846,7 @@
           <a:p>
             <a:pPr>
               <a:lnSpc>
-                <a:spcPct val="115000"/>
+                <a:spcPct val="149500"/>
               </a:lnSpc>
             </a:pPr>
             <a:r>
@@ -9003,7 +8871,7 @@
           <a:p>
             <a:pPr>
               <a:lnSpc>
-                <a:spcPct val="115000"/>
+                <a:spcPct val="149500"/>
               </a:lnSpc>
             </a:pPr>
             <a:r>
@@ -9028,7 +8896,7 @@
           <a:p>
             <a:pPr>
               <a:lnSpc>
-                <a:spcPct val="115000"/>
+                <a:spcPct val="149500"/>
               </a:lnSpc>
             </a:pPr>
             <a:r>
@@ -9419,7 +9287,7 @@
           <a:p>
             <a:pPr>
               <a:lnSpc>
-                <a:spcPct val="115000"/>
+                <a:spcPct val="149500"/>
               </a:lnSpc>
             </a:pPr>
             <a:r>
@@ -9444,7 +9312,7 @@
           <a:p>
             <a:pPr>
               <a:lnSpc>
-                <a:spcPct val="115000"/>
+                <a:spcPct val="149500"/>
               </a:lnSpc>
             </a:pPr>
             <a:r>
@@ -9469,7 +9337,7 @@
           <a:p>
             <a:pPr>
               <a:lnSpc>
-                <a:spcPct val="115000"/>
+                <a:spcPct val="149500"/>
               </a:lnSpc>
             </a:pPr>
             <a:r>
@@ -10203,7 +10071,7 @@
           <a:p>
             <a:pPr>
               <a:lnSpc>
-                <a:spcPct val="115000"/>
+                <a:spcPct val="149500"/>
               </a:lnSpc>
             </a:pPr>
             <a:r>
@@ -10228,7 +10096,7 @@
           <a:p>
             <a:pPr>
               <a:lnSpc>
-                <a:spcPct val="115000"/>
+                <a:spcPct val="149500"/>
               </a:lnSpc>
             </a:pPr>
             <a:r>
@@ -10253,7 +10121,7 @@
           <a:p>
             <a:pPr>
               <a:lnSpc>
-                <a:spcPct val="115000"/>
+                <a:spcPct val="149500"/>
               </a:lnSpc>
             </a:pPr>
             <a:r>
@@ -10758,7 +10626,7 @@
           <a:p>
             <a:pPr>
               <a:lnSpc>
-                <a:spcPct val="115000"/>
+                <a:spcPct val="149500"/>
               </a:lnSpc>
             </a:pPr>
             <a:r>
@@ -10783,7 +10651,7 @@
           <a:p>
             <a:pPr>
               <a:lnSpc>
-                <a:spcPct val="115000"/>
+                <a:spcPct val="149500"/>
               </a:lnSpc>
             </a:pPr>
             <a:r>
@@ -10808,7 +10676,7 @@
           <a:p>
             <a:pPr>
               <a:lnSpc>
-                <a:spcPct val="115000"/>
+                <a:spcPct val="149500"/>
               </a:lnSpc>
             </a:pPr>
             <a:r>
@@ -10833,7 +10701,7 @@
           <a:p>
             <a:pPr>
               <a:lnSpc>
-                <a:spcPct val="115000"/>
+                <a:spcPct val="149500"/>
               </a:lnSpc>
             </a:pPr>
             <a:r>

--- a/class/cloud_infra_mgmt/12주차_Jenkins_CICD심화/01_강의자료/3차시_PollSCM자동빌드연동.pptx
+++ b/class/cloud_infra_mgmt/12주차_Jenkins_CICD심화/01_강의자료/3차시_PollSCM자동빌드연동.pptx
@@ -4972,6 +4972,8 @@
                   <a:srgbClr val="14B8A6"/>
                 </a:solidFill>
                 <a:latin typeface="맑은 고딕"/>
+                <a:ea typeface="맑은 고딕"/>
+                <a:cs typeface="맑은 고딕"/>
               </a:rPr>
               <a:t>클라우드인프라관리  ·  12주차 3차시</a:t>
             </a:r>
@@ -5007,6 +5009,8 @@
                   <a:srgbClr val="FFFFFF"/>
                 </a:solidFill>
                 <a:latin typeface="맑은 고딕"/>
+                <a:ea typeface="맑은 고딕"/>
+                <a:cs typeface="맑은 고딕"/>
               </a:rPr>
               <a:t>Poll SCM 자동 빌드 연동</a:t>
             </a:r>
@@ -5042,6 +5046,8 @@
                   <a:srgbClr val="C9D3E6"/>
                 </a:solidFill>
                 <a:latin typeface="맑은 고딕"/>
+                <a:ea typeface="맑은 고딕"/>
+                <a:cs typeface="맑은 고딕"/>
               </a:rPr>
               <a:t>git push 한 번으로 빌드가 저절로 시작되게</a:t>
             </a:r>
@@ -5077,6 +5083,8 @@
                   <a:srgbClr val="FFFFFF"/>
                 </a:solidFill>
                 <a:latin typeface="맑은 고딕"/>
+                <a:ea typeface="맑은 고딕"/>
+                <a:cs typeface="맑은 고딕"/>
               </a:rPr>
               <a:t>영남이공대학교 김지윤교수</a:t>
             </a:r>
@@ -5236,6 +5244,8 @@
                   <a:srgbClr val="14213D"/>
                 </a:solidFill>
                 <a:latin typeface="맑은 고딕"/>
+                <a:ea typeface="맑은 고딕"/>
+                <a:cs typeface="맑은 고딕"/>
               </a:rPr>
               <a:t>03</a:t>
             </a:r>
@@ -5271,6 +5281,8 @@
                   <a:srgbClr val="14B8A6"/>
                 </a:solidFill>
                 <a:latin typeface="맑은 고딕"/>
+                <a:ea typeface="맑은 고딕"/>
+                <a:cs typeface="맑은 고딕"/>
               </a:rPr>
               <a:t>실습 안내</a:t>
             </a:r>
@@ -5306,6 +5318,8 @@
                   <a:srgbClr val="FFFFFF"/>
                 </a:solidFill>
                 <a:latin typeface="맑은 고딕"/>
+                <a:ea typeface="맑은 고딕"/>
+                <a:cs typeface="맑은 고딕"/>
               </a:rPr>
               <a:t>Killercoda — Poll SCM 설정 실습</a:t>
             </a:r>
@@ -5345,6 +5359,8 @@
                   <a:srgbClr val="0D9488"/>
                 </a:solidFill>
                 <a:latin typeface="맑은 고딕"/>
+                <a:ea typeface="맑은 고딕"/>
+                <a:cs typeface="맑은 고딕"/>
               </a:rPr>
               <a:t>●  </a:t>
             </a:r>
@@ -5354,6 +5370,8 @@
                   <a:srgbClr val="222733"/>
                 </a:solidFill>
                 <a:latin typeface="맑은 고딕"/>
+                <a:ea typeface="맑은 고딕"/>
+                <a:cs typeface="맑은 고딕"/>
               </a:rPr>
               <a:t>제공된 Pipeline Job에 Poll SCM(* * * * *) 설정 적용</a:t>
             </a:r>
@@ -5370,6 +5388,8 @@
                   <a:srgbClr val="0D9488"/>
                 </a:solidFill>
                 <a:latin typeface="맑은 고딕"/>
+                <a:ea typeface="맑은 고딕"/>
+                <a:cs typeface="맑은 고딕"/>
               </a:rPr>
               <a:t>●  </a:t>
             </a:r>
@@ -5379,6 +5399,8 @@
                   <a:srgbClr val="222733"/>
                 </a:solidFill>
                 <a:latin typeface="맑은 고딕"/>
+                <a:ea typeface="맑은 고딕"/>
+                <a:cs typeface="맑은 고딕"/>
               </a:rPr>
               <a:t>교수자가 미리 준비한 저장소에 변경 사항을 시뮬레이션 → 자동 빌드 트리거 관찰</a:t>
             </a:r>
@@ -5395,6 +5417,8 @@
                   <a:srgbClr val="0D9488"/>
                 </a:solidFill>
                 <a:latin typeface="맑은 고딕"/>
+                <a:ea typeface="맑은 고딕"/>
+                <a:cs typeface="맑은 고딕"/>
               </a:rPr>
               <a:t>●  </a:t>
             </a:r>
@@ -5404,6 +5428,8 @@
                   <a:srgbClr val="222733"/>
                 </a:solidFill>
                 <a:latin typeface="맑은 고딕"/>
+                <a:ea typeface="맑은 고딕"/>
+                <a:cs typeface="맑은 고딕"/>
               </a:rPr>
               <a:t>Build History에 'SCM 변경 감지'로 자동 실행된 빌드가 나타나는 것을 확인</a:t>
             </a:r>
@@ -5439,6 +5465,8 @@
                   <a:srgbClr val="5B6373"/>
                 </a:solidFill>
                 <a:latin typeface="맑은 고딕"/>
+                <a:ea typeface="맑은 고딕"/>
+                <a:cs typeface="맑은 고딕"/>
               </a:rPr>
               <a:t>클라우드인프라관리  ·  12주차 3차시</a:t>
             </a:r>
@@ -5474,6 +5502,8 @@
                   <a:srgbClr val="5B6373"/>
                 </a:solidFill>
                 <a:latin typeface="맑은 고딕"/>
+                <a:ea typeface="맑은 고딕"/>
+                <a:cs typeface="맑은 고딕"/>
               </a:rPr>
               <a:t>10 / 13</a:t>
             </a:r>
@@ -5677,6 +5707,8 @@
                   <a:srgbClr val="14213D"/>
                 </a:solidFill>
                 <a:latin typeface="맑은 고딕"/>
+                <a:ea typeface="맑은 고딕"/>
+                <a:cs typeface="맑은 고딕"/>
               </a:rPr>
               <a:t>03</a:t>
             </a:r>
@@ -5712,6 +5744,8 @@
                   <a:srgbClr val="14B8A6"/>
                 </a:solidFill>
                 <a:latin typeface="맑은 고딕"/>
+                <a:ea typeface="맑은 고딕"/>
+                <a:cs typeface="맑은 고딕"/>
               </a:rPr>
               <a:t>실습 안내</a:t>
             </a:r>
@@ -5747,6 +5781,8 @@
                   <a:srgbClr val="FFFFFF"/>
                 </a:solidFill>
                 <a:latin typeface="맑은 고딕"/>
+                <a:ea typeface="맑은 고딕"/>
+                <a:cs typeface="맑은 고딕"/>
               </a:rPr>
               <a:t>VM 안내 — 12주차 종합 제출</a:t>
             </a:r>
@@ -5786,6 +5822,8 @@
                   <a:srgbClr val="0D9488"/>
                 </a:solidFill>
                 <a:latin typeface="맑은 고딕"/>
+                <a:ea typeface="맑은 고딕"/>
+                <a:cs typeface="맑은 고딕"/>
               </a:rPr>
               <a:t>●  </a:t>
             </a:r>
@@ -5795,6 +5833,8 @@
                   <a:srgbClr val="222733"/>
                 </a:solidFill>
                 <a:latin typeface="맑은 고딕"/>
+                <a:ea typeface="맑은 고딕"/>
+                <a:cs typeface="맑은 고딕"/>
               </a:rPr>
               <a:t>개인 VM의 myflask-pipeline Job 설정에서 Poll SCM(* * * * *) 적용</a:t>
             </a:r>
@@ -5811,6 +5851,8 @@
                   <a:srgbClr val="0D9488"/>
                 </a:solidFill>
                 <a:latin typeface="맑은 고딕"/>
+                <a:ea typeface="맑은 고딕"/>
+                <a:cs typeface="맑은 고딕"/>
               </a:rPr>
               <a:t>●  </a:t>
             </a:r>
@@ -5820,6 +5862,8 @@
                   <a:srgbClr val="222733"/>
                 </a:solidFill>
                 <a:latin typeface="맑은 고딕"/>
+                <a:ea typeface="맑은 고딕"/>
+                <a:cs typeface="맑은 고딕"/>
               </a:rPr>
               <a:t>로컬에서 app.py를 한 줄 수정하고 git push</a:t>
             </a:r>
@@ -5836,6 +5880,8 @@
                   <a:srgbClr val="0D9488"/>
                 </a:solidFill>
                 <a:latin typeface="맑은 고딕"/>
+                <a:ea typeface="맑은 고딕"/>
+                <a:cs typeface="맑은 고딕"/>
               </a:rPr>
               <a:t>●  </a:t>
             </a:r>
@@ -5845,6 +5891,8 @@
                   <a:srgbClr val="222733"/>
                 </a:solidFill>
                 <a:latin typeface="맑은 고딕"/>
+                <a:ea typeface="맑은 고딕"/>
+                <a:cs typeface="맑은 고딕"/>
               </a:rPr>
               <a:t>1분 이내 자동으로 빌드가 시작되는 것을 Build History에서 확인 — 캡처 첨부</a:t>
             </a:r>
@@ -5861,6 +5909,8 @@
                   <a:srgbClr val="0D9488"/>
                 </a:solidFill>
                 <a:latin typeface="맑은 고딕"/>
+                <a:ea typeface="맑은 고딕"/>
+                <a:cs typeface="맑은 고딕"/>
               </a:rPr>
               <a:t>●  </a:t>
             </a:r>
@@ -5870,6 +5920,8 @@
                   <a:srgbClr val="222733"/>
                 </a:solidFill>
                 <a:latin typeface="맑은 고딕"/>
+                <a:ea typeface="맑은 고딕"/>
+                <a:cs typeface="맑은 고딕"/>
               </a:rPr>
               <a:t>12주차 1~3차시(문법·Jenkinsfile·Poll SCM) 실습을 종합해서 제출</a:t>
             </a:r>
@@ -5905,6 +5957,8 @@
                   <a:srgbClr val="5B6373"/>
                 </a:solidFill>
                 <a:latin typeface="맑은 고딕"/>
+                <a:ea typeface="맑은 고딕"/>
+                <a:cs typeface="맑은 고딕"/>
               </a:rPr>
               <a:t>클라우드인프라관리  ·  12주차 3차시</a:t>
             </a:r>
@@ -5940,6 +5994,8 @@
                   <a:srgbClr val="5B6373"/>
                 </a:solidFill>
                 <a:latin typeface="맑은 고딕"/>
+                <a:ea typeface="맑은 고딕"/>
+                <a:cs typeface="맑은 고딕"/>
               </a:rPr>
               <a:t>11 / 13</a:t>
             </a:r>
@@ -6125,6 +6181,8 @@
                   <a:srgbClr val="FFFFFF"/>
                 </a:solidFill>
                 <a:latin typeface="맑은 고딕"/>
+                <a:ea typeface="맑은 고딕"/>
+                <a:cs typeface="맑은 고딕"/>
               </a:rPr>
               <a:t>오늘의 정리</a:t>
             </a:r>
@@ -6178,6 +6236,8 @@
                   <a:srgbClr val="14213D"/>
                 </a:solidFill>
                 <a:latin typeface="맑은 고딕"/>
+                <a:ea typeface="맑은 고딕"/>
+                <a:cs typeface="맑은 고딕"/>
               </a:rPr>
               <a:t>1</a:t>
             </a:r>
@@ -6213,6 +6273,8 @@
                   <a:srgbClr val="FFFFFF"/>
                 </a:solidFill>
                 <a:latin typeface="맑은 고딕"/>
+                <a:ea typeface="맑은 고딕"/>
+                <a:cs typeface="맑은 고딕"/>
               </a:rPr>
               <a:t>Webhook은 GitHub이 직접 알려주는 방식, Poll SCM은 Jenkins가 스스로 물어보는 방식이다</a:t>
             </a:r>
@@ -6266,6 +6328,8 @@
                   <a:srgbClr val="14213D"/>
                 </a:solidFill>
                 <a:latin typeface="맑은 고딕"/>
+                <a:ea typeface="맑은 고딕"/>
+                <a:cs typeface="맑은 고딕"/>
               </a:rPr>
               <a:t>2</a:t>
             </a:r>
@@ -6301,6 +6365,8 @@
                   <a:srgbClr val="FFFFFF"/>
                 </a:solidFill>
                 <a:latin typeface="맑은 고딕"/>
+                <a:ea typeface="맑은 고딕"/>
+                <a:cs typeface="맑은 고딕"/>
               </a:rPr>
               <a:t>NAT 뒤에 있는 학생 VM 환경에서는 Poll SCM(예: 매 1분 확인)으로 git push 시 자동 빌드를 구현한다</a:t>
             </a:r>
@@ -6442,6 +6508,8 @@
                   <a:srgbClr val="FFFFFF"/>
                 </a:solidFill>
                 <a:latin typeface="맑은 고딕"/>
+                <a:ea typeface="맑은 고딕"/>
+                <a:cs typeface="맑은 고딕"/>
               </a:rPr>
               <a:t>다음 주 예고</a:t>
             </a:r>
@@ -6477,6 +6545,8 @@
                   <a:srgbClr val="14B8A6"/>
                 </a:solidFill>
                 <a:latin typeface="맑은 고딕"/>
+                <a:ea typeface="맑은 고딕"/>
+                <a:cs typeface="맑은 고딕"/>
               </a:rPr>
               <a:t>다음 차시 예고 — 13주차 — AI 미니 챗봇 전체 자동 배포 파이프라인</a:t>
             </a:r>
@@ -6512,6 +6582,8 @@
                   <a:srgbClr val="FFFFFF"/>
                 </a:solidFill>
                 <a:latin typeface="맑은 고딕"/>
+                <a:ea typeface="맑은 고딕"/>
+                <a:cs typeface="맑은 고딕"/>
               </a:rPr>
               <a:t>오늘까지 만든 Checkout→Build→Poll SCM 파이프라인에 Docker Hub Push와 K8s 자동 배포까지 이어붙여, Git부터 K8s까지 완전히 자동화된 파이프라인을 완성합니다.</a:t>
             </a:r>
@@ -6697,6 +6769,8 @@
                   <a:srgbClr val="14B8A6"/>
                 </a:solidFill>
                 <a:latin typeface="맑은 고딕"/>
+                <a:ea typeface="맑은 고딕"/>
+                <a:cs typeface="맑은 고딕"/>
               </a:rPr>
               <a:t>12주차, 그리고 Jenkins 단원을 마치며</a:t>
             </a:r>
@@ -6732,6 +6806,8 @@
                   <a:srgbClr val="FFFFFF"/>
                 </a:solidFill>
                 <a:latin typeface="맑은 고딕"/>
+                <a:ea typeface="맑은 고딕"/>
+                <a:cs typeface="맑은 고딕"/>
               </a:rPr>
               <a:t>수고하셨습니다!</a:t>
             </a:r>
@@ -6771,6 +6847,8 @@
                   <a:srgbClr val="C9D3E6"/>
                 </a:solidFill>
                 <a:latin typeface="맑은 고딕"/>
+                <a:ea typeface="맑은 고딕"/>
+                <a:cs typeface="맑은 고딕"/>
               </a:rPr>
               <a:t>Jenkinsfile 문법부터 Poll SCM 자동 빌드까지, CI/CD의 핵심을 완주하셨습니다. 다음 주부터는 이 모든 걸 하나로 합치는 대통합 실습이 시작됩니다.</a:t>
             </a:r>
@@ -6912,6 +6990,8 @@
                   <a:srgbClr val="14B8A6"/>
                 </a:solidFill>
                 <a:latin typeface="맑은 고딕"/>
+                <a:ea typeface="맑은 고딕"/>
+                <a:cs typeface="맑은 고딕"/>
               </a:rPr>
               <a:t>SESSION OVERVIEW</a:t>
             </a:r>
@@ -6947,6 +7027,8 @@
                   <a:srgbClr val="FFFFFF"/>
                 </a:solidFill>
                 <a:latin typeface="맑은 고딕"/>
+                <a:ea typeface="맑은 고딕"/>
+                <a:cs typeface="맑은 고딕"/>
               </a:rPr>
               <a:t>오늘의 학습 목표</a:t>
             </a:r>
@@ -6986,6 +7068,8 @@
                   <a:srgbClr val="222733"/>
                 </a:solidFill>
                 <a:latin typeface="맑은 고딕"/>
+                <a:ea typeface="맑은 고딕"/>
+                <a:cs typeface="맑은 고딕"/>
               </a:rPr>
               <a:t>1.  Webhook과 Poll SCM 두 가지 자동 빌드 방식의 차이를 이해한다</a:t>
             </a:r>
@@ -7002,6 +7086,8 @@
                   <a:srgbClr val="222733"/>
                 </a:solidFill>
                 <a:latin typeface="맑은 고딕"/>
+                <a:ea typeface="맑은 고딕"/>
+                <a:cs typeface="맑은 고딕"/>
               </a:rPr>
               <a:t>2.  왜 우리 실습 환경에서는 Poll SCM을 써야 하는지 이해한다(NAT 문제)</a:t>
             </a:r>
@@ -7018,6 +7104,8 @@
                   <a:srgbClr val="222733"/>
                 </a:solidFill>
                 <a:latin typeface="맑은 고딕"/>
+                <a:ea typeface="맑은 고딕"/>
+                <a:cs typeface="맑은 고딕"/>
               </a:rPr>
               <a:t>3.  Poll SCM을 설정하고 git push로 자동 빌드가 트리거되는 것을 확인한다</a:t>
             </a:r>
@@ -7053,6 +7141,8 @@
                   <a:srgbClr val="5B6373"/>
                 </a:solidFill>
                 <a:latin typeface="맑은 고딕"/>
+                <a:ea typeface="맑은 고딕"/>
+                <a:cs typeface="맑은 고딕"/>
               </a:rPr>
               <a:t>클라우드인프라관리  ·  12주차 3차시</a:t>
             </a:r>
@@ -7088,6 +7178,8 @@
                   <a:srgbClr val="5B6373"/>
                 </a:solidFill>
                 <a:latin typeface="맑은 고딕"/>
+                <a:ea typeface="맑은 고딕"/>
+                <a:cs typeface="맑은 고딕"/>
               </a:rPr>
               <a:t>02 / 13</a:t>
             </a:r>
@@ -7273,6 +7365,8 @@
                   <a:srgbClr val="14B8A6"/>
                 </a:solidFill>
                 <a:latin typeface="맑은 고딕"/>
+                <a:ea typeface="맑은 고딕"/>
+                <a:cs typeface="맑은 고딕"/>
               </a:rPr>
               <a:t>SESSION OVERVIEW</a:t>
             </a:r>
@@ -7308,6 +7402,8 @@
                   <a:srgbClr val="FFFFFF"/>
                 </a:solidFill>
                 <a:latin typeface="맑은 고딕"/>
+                <a:ea typeface="맑은 고딕"/>
+                <a:cs typeface="맑은 고딕"/>
               </a:rPr>
               <a:t>오늘의 진행 순서</a:t>
             </a:r>
@@ -7519,6 +7615,8 @@
                   <a:srgbClr val="FFFFFF"/>
                 </a:solidFill>
                 <a:latin typeface="맑은 고딕"/>
+                <a:ea typeface="맑은 고딕"/>
+                <a:cs typeface="맑은 고딕"/>
               </a:rPr>
               <a:t>1</a:t>
             </a:r>
@@ -7602,6 +7700,8 @@
                   <a:srgbClr val="14213D"/>
                 </a:solidFill>
                 <a:latin typeface="맑은 고딕"/>
+                <a:ea typeface="맑은 고딕"/>
+                <a:cs typeface="맑은 고딕"/>
               </a:rPr>
               <a:t>개념 설명</a:t>
             </a:r>
@@ -7641,6 +7741,8 @@
                   <a:srgbClr val="222733"/>
                 </a:solidFill>
                 <a:latin typeface="맑은 고딕"/>
+                <a:ea typeface="맑은 고딕"/>
+                <a:cs typeface="맑은 고딕"/>
               </a:rPr>
               <a:t>강의자료 기반 직접 강의</a:t>
             </a:r>
@@ -7720,6 +7822,8 @@
                   <a:srgbClr val="FFFFFF"/>
                 </a:solidFill>
                 <a:latin typeface="맑은 고딕"/>
+                <a:ea typeface="맑은 고딕"/>
+                <a:cs typeface="맑은 고딕"/>
               </a:rPr>
               <a:t>2</a:t>
             </a:r>
@@ -7803,6 +7907,8 @@
                   <a:srgbClr val="14213D"/>
                 </a:solidFill>
                 <a:latin typeface="맑은 고딕"/>
+                <a:ea typeface="맑은 고딕"/>
+                <a:cs typeface="맑은 고딕"/>
               </a:rPr>
               <a:t>Killercoda</a:t>
             </a:r>
@@ -7842,6 +7948,8 @@
                   <a:srgbClr val="222733"/>
                 </a:solidFill>
                 <a:latin typeface="맑은 고딕"/>
+                <a:ea typeface="맑은 고딕"/>
+                <a:cs typeface="맑은 고딕"/>
               </a:rPr>
               <a:t>Poll SCM 설정 실습</a:t>
             </a:r>
@@ -7921,6 +8029,8 @@
                   <a:srgbClr val="FFFFFF"/>
                 </a:solidFill>
                 <a:latin typeface="맑은 고딕"/>
+                <a:ea typeface="맑은 고딕"/>
+                <a:cs typeface="맑은 고딕"/>
               </a:rPr>
               <a:t>3</a:t>
             </a:r>
@@ -8004,6 +8114,8 @@
                   <a:srgbClr val="14213D"/>
                 </a:solidFill>
                 <a:latin typeface="맑은 고딕"/>
+                <a:ea typeface="맑은 고딕"/>
+                <a:cs typeface="맑은 고딕"/>
               </a:rPr>
               <a:t>VM 안내</a:t>
             </a:r>
@@ -8043,6 +8155,8 @@
                   <a:srgbClr val="222733"/>
                 </a:solidFill>
                 <a:latin typeface="맑은 고딕"/>
+                <a:ea typeface="맑은 고딕"/>
+                <a:cs typeface="맑은 고딕"/>
               </a:rPr>
               <a:t>VM에서 동일 실습</a:t>
             </a:r>
@@ -8122,6 +8236,8 @@
                   <a:srgbClr val="FFFFFF"/>
                 </a:solidFill>
                 <a:latin typeface="맑은 고딕"/>
+                <a:ea typeface="맑은 고딕"/>
+                <a:cs typeface="맑은 고딕"/>
               </a:rPr>
               <a:t>4</a:t>
             </a:r>
@@ -8205,6 +8321,8 @@
                   <a:srgbClr val="14213D"/>
                 </a:solidFill>
                 <a:latin typeface="맑은 고딕"/>
+                <a:ea typeface="맑은 고딕"/>
+                <a:cs typeface="맑은 고딕"/>
               </a:rPr>
               <a:t>결과 제출</a:t>
             </a:r>
@@ -8244,6 +8362,8 @@
                   <a:srgbClr val="222733"/>
                 </a:solidFill>
                 <a:latin typeface="맑은 고딕"/>
+                <a:ea typeface="맑은 고딕"/>
+                <a:cs typeface="맑은 고딕"/>
               </a:rPr>
               <a:t>12주차 종합 제출</a:t>
             </a:r>
@@ -8279,6 +8399,8 @@
                   <a:srgbClr val="5B6373"/>
                 </a:solidFill>
                 <a:latin typeface="맑은 고딕"/>
+                <a:ea typeface="맑은 고딕"/>
+                <a:cs typeface="맑은 고딕"/>
               </a:rPr>
               <a:t>클라우드인프라관리  ·  12주차 3차시</a:t>
             </a:r>
@@ -8314,6 +8436,8 @@
                   <a:srgbClr val="5B6373"/>
                 </a:solidFill>
                 <a:latin typeface="맑은 고딕"/>
+                <a:ea typeface="맑은 고딕"/>
+                <a:cs typeface="맑은 고딕"/>
               </a:rPr>
               <a:t>03 / 13</a:t>
             </a:r>
@@ -8517,6 +8641,8 @@
                   <a:srgbClr val="14213D"/>
                 </a:solidFill>
                 <a:latin typeface="맑은 고딕"/>
+                <a:ea typeface="맑은 고딕"/>
+                <a:cs typeface="맑은 고딕"/>
               </a:rPr>
               <a:t>PART 01</a:t>
             </a:r>
@@ -8552,6 +8678,8 @@
                   <a:srgbClr val="FFFFFF"/>
                 </a:solidFill>
                 <a:latin typeface="맑은 고딕"/>
+                <a:ea typeface="맑은 고딕"/>
+                <a:cs typeface="맑은 고딕"/>
               </a:rPr>
               <a:t>자동 빌드의 두 가지 방식</a:t>
             </a:r>
@@ -8587,6 +8715,8 @@
                   <a:srgbClr val="C9D3E6"/>
                 </a:solidFill>
                 <a:latin typeface="맑은 고딕"/>
+                <a:ea typeface="맑은 고딕"/>
+                <a:cs typeface="맑은 고딕"/>
               </a:rPr>
               <a:t>Webhook과 Poll SCM</a:t>
             </a:r>
@@ -8746,6 +8876,8 @@
                   <a:srgbClr val="14213D"/>
                 </a:solidFill>
                 <a:latin typeface="맑은 고딕"/>
+                <a:ea typeface="맑은 고딕"/>
+                <a:cs typeface="맑은 고딕"/>
               </a:rPr>
               <a:t>01</a:t>
             </a:r>
@@ -8781,6 +8913,8 @@
                   <a:srgbClr val="14B8A6"/>
                 </a:solidFill>
                 <a:latin typeface="맑은 고딕"/>
+                <a:ea typeface="맑은 고딕"/>
+                <a:cs typeface="맑은 고딕"/>
               </a:rPr>
               <a:t>PART 1 · 자동 빌드 방식</a:t>
             </a:r>
@@ -8816,6 +8950,8 @@
                   <a:srgbClr val="FFFFFF"/>
                 </a:solidFill>
                 <a:latin typeface="맑은 고딕"/>
+                <a:ea typeface="맑은 고딕"/>
+                <a:cs typeface="맑은 고딕"/>
               </a:rPr>
               <a:t>Webhook — 가장 흔히 쓰는 방식</a:t>
             </a:r>
@@ -8855,6 +8991,8 @@
                   <a:srgbClr val="0D9488"/>
                 </a:solidFill>
                 <a:latin typeface="맑은 고딕"/>
+                <a:ea typeface="맑은 고딕"/>
+                <a:cs typeface="맑은 고딕"/>
               </a:rPr>
               <a:t>●  </a:t>
             </a:r>
@@ -8864,6 +9002,8 @@
                   <a:srgbClr val="222733"/>
                 </a:solidFill>
                 <a:latin typeface="맑은 고딕"/>
+                <a:ea typeface="맑은 고딕"/>
+                <a:cs typeface="맑은 고딕"/>
               </a:rPr>
               <a:t>GitHub이 push를 감지하면, 즉시 Jenkins 서버로 '지금 push됐다'는 알림(HTTP 요청)을 보냄</a:t>
             </a:r>
@@ -8880,6 +9020,8 @@
                   <a:srgbClr val="0D9488"/>
                 </a:solidFill>
                 <a:latin typeface="맑은 고딕"/>
+                <a:ea typeface="맑은 고딕"/>
+                <a:cs typeface="맑은 고딕"/>
               </a:rPr>
               <a:t>●  </a:t>
             </a:r>
@@ -8889,6 +9031,8 @@
                   <a:srgbClr val="222733"/>
                 </a:solidFill>
                 <a:latin typeface="맑은 고딕"/>
+                <a:ea typeface="맑은 고딕"/>
+                <a:cs typeface="맑은 고딕"/>
               </a:rPr>
               <a:t>실시간에 가깝게 빠르지만, GitHub이 Jenkins 서버에 직접 접속할 수 있어야 함</a:t>
             </a:r>
@@ -8905,6 +9049,8 @@
                   <a:srgbClr val="0D9488"/>
                 </a:solidFill>
                 <a:latin typeface="맑은 고딕"/>
+                <a:ea typeface="맑은 고딕"/>
+                <a:cs typeface="맑은 고딕"/>
               </a:rPr>
               <a:t>●  </a:t>
             </a:r>
@@ -8914,6 +9060,8 @@
                   <a:srgbClr val="222733"/>
                 </a:solidFill>
                 <a:latin typeface="맑은 고딕"/>
+                <a:ea typeface="맑은 고딕"/>
+                <a:cs typeface="맑은 고딕"/>
               </a:rPr>
               <a:t>즉, Jenkins 서버가 인터넷에서 접근 가능한 공인 주소를 가지고 있어야 동작</a:t>
             </a:r>
@@ -8949,6 +9097,8 @@
                   <a:srgbClr val="5B6373"/>
                 </a:solidFill>
                 <a:latin typeface="맑은 고딕"/>
+                <a:ea typeface="맑은 고딕"/>
+                <a:cs typeface="맑은 고딕"/>
               </a:rPr>
               <a:t>클라우드인프라관리  ·  12주차 3차시</a:t>
             </a:r>
@@ -8984,6 +9134,8 @@
                   <a:srgbClr val="5B6373"/>
                 </a:solidFill>
                 <a:latin typeface="맑은 고딕"/>
+                <a:ea typeface="맑은 고딕"/>
+                <a:cs typeface="맑은 고딕"/>
               </a:rPr>
               <a:t>05 / 13</a:t>
             </a:r>
@@ -9187,6 +9339,8 @@
                   <a:srgbClr val="14213D"/>
                 </a:solidFill>
                 <a:latin typeface="맑은 고딕"/>
+                <a:ea typeface="맑은 고딕"/>
+                <a:cs typeface="맑은 고딕"/>
               </a:rPr>
               <a:t>01</a:t>
             </a:r>
@@ -9222,6 +9376,8 @@
                   <a:srgbClr val="14B8A6"/>
                 </a:solidFill>
                 <a:latin typeface="맑은 고딕"/>
+                <a:ea typeface="맑은 고딕"/>
+                <a:cs typeface="맑은 고딕"/>
               </a:rPr>
               <a:t>PART 1 · 자동 빌드 방식</a:t>
             </a:r>
@@ -9257,6 +9413,8 @@
                   <a:srgbClr val="FFFFFF"/>
                 </a:solidFill>
                 <a:latin typeface="맑은 고딕"/>
+                <a:ea typeface="맑은 고딕"/>
+                <a:cs typeface="맑은 고딕"/>
               </a:rPr>
               <a:t>우리 VM은 왜 Webhook을 못 쓸까</a:t>
             </a:r>
@@ -9296,6 +9454,8 @@
                   <a:srgbClr val="0D9488"/>
                 </a:solidFill>
                 <a:latin typeface="맑은 고딕"/>
+                <a:ea typeface="맑은 고딕"/>
+                <a:cs typeface="맑은 고딕"/>
               </a:rPr>
               <a:t>●  </a:t>
             </a:r>
@@ -9305,6 +9465,8 @@
                   <a:srgbClr val="222733"/>
                 </a:solidFill>
                 <a:latin typeface="맑은 고딕"/>
+                <a:ea typeface="맑은 고딕"/>
+                <a:cs typeface="맑은 고딕"/>
               </a:rPr>
               <a:t>학생 개인 VM은 가정용 공유기 NAT 뒤에 있음 — 외부(GitHub)에서 직접 접속할 수 있는 주소가 없음</a:t>
             </a:r>
@@ -9321,6 +9483,8 @@
                   <a:srgbClr val="0D9488"/>
                 </a:solidFill>
                 <a:latin typeface="맑은 고딕"/>
+                <a:ea typeface="맑은 고딕"/>
+                <a:cs typeface="맑은 고딕"/>
               </a:rPr>
               <a:t>●  </a:t>
             </a:r>
@@ -9330,6 +9494,8 @@
                   <a:srgbClr val="222733"/>
                 </a:solidFill>
                 <a:latin typeface="맑은 고딕"/>
+                <a:ea typeface="맑은 고딕"/>
+                <a:cs typeface="맑은 고딕"/>
               </a:rPr>
               <a:t>즉 GitHub이 'push됐다'는 알림을 우리 VM의 Jenkins로 보낼 방법이 없음</a:t>
             </a:r>
@@ -9346,6 +9512,8 @@
                   <a:srgbClr val="0D9488"/>
                 </a:solidFill>
                 <a:latin typeface="맑은 고딕"/>
+                <a:ea typeface="맑은 고딕"/>
+                <a:cs typeface="맑은 고딕"/>
               </a:rPr>
               <a:t>●  </a:t>
             </a:r>
@@ -9355,6 +9523,8 @@
                   <a:srgbClr val="222733"/>
                 </a:solidFill>
                 <a:latin typeface="맑은 고딕"/>
+                <a:ea typeface="맑은 고딕"/>
+                <a:cs typeface="맑은 고딕"/>
               </a:rPr>
               <a:t>이 문제를 해결하는 방식이 Poll SCM — Jenkins가 스스로 GitHub에 물어보러 가는 방식</a:t>
             </a:r>
@@ -9434,6 +9604,8 @@
                   <a:srgbClr val="FFFFFF"/>
                 </a:solidFill>
                 <a:latin typeface="맑은 고딕"/>
+                <a:ea typeface="맑은 고딕"/>
+                <a:cs typeface="맑은 고딕"/>
               </a:rPr>
               <a:t>🔗  4주차 연결</a:t>
             </a:r>
@@ -9469,6 +9641,8 @@
                   <a:srgbClr val="FFFFFF"/>
                 </a:solidFill>
                 <a:latin typeface="맑은 고딕"/>
+                <a:ea typeface="맑은 고딕"/>
+                <a:cs typeface="맑은 고딕"/>
               </a:rPr>
               <a:t>4주차에 Jenkins→minikube 연결에서도 비슷한 네트워크 제약을 만난 적이 있었죠(13주차에 재등장)</a:t>
             </a:r>
@@ -9504,6 +9678,8 @@
                   <a:srgbClr val="5B6373"/>
                 </a:solidFill>
                 <a:latin typeface="맑은 고딕"/>
+                <a:ea typeface="맑은 고딕"/>
+                <a:cs typeface="맑은 고딕"/>
               </a:rPr>
               <a:t>클라우드인프라관리  ·  12주차 3차시</a:t>
             </a:r>
@@ -9539,6 +9715,8 @@
                   <a:srgbClr val="5B6373"/>
                 </a:solidFill>
                 <a:latin typeface="맑은 고딕"/>
+                <a:ea typeface="맑은 고딕"/>
+                <a:cs typeface="맑은 고딕"/>
               </a:rPr>
               <a:t>06 / 13</a:t>
             </a:r>
@@ -9742,6 +9920,8 @@
                   <a:srgbClr val="14213D"/>
                 </a:solidFill>
                 <a:latin typeface="맑은 고딕"/>
+                <a:ea typeface="맑은 고딕"/>
+                <a:cs typeface="맑은 고딕"/>
               </a:rPr>
               <a:t>PART 02</a:t>
             </a:r>
@@ -9777,6 +9957,8 @@
                   <a:srgbClr val="FFFFFF"/>
                 </a:solidFill>
                 <a:latin typeface="맑은 고딕"/>
+                <a:ea typeface="맑은 고딕"/>
+                <a:cs typeface="맑은 고딕"/>
               </a:rPr>
               <a:t>Poll SCM 설정</a:t>
             </a:r>
@@ -9812,6 +9994,8 @@
                   <a:srgbClr val="C9D3E6"/>
                 </a:solidFill>
                 <a:latin typeface="맑은 고딕"/>
+                <a:ea typeface="맑은 고딕"/>
+                <a:cs typeface="맑은 고딕"/>
               </a:rPr>
               <a:t>Jenkins가 스스로 물어보러 간다</a:t>
             </a:r>
@@ -9971,6 +10155,8 @@
                   <a:srgbClr val="14213D"/>
                 </a:solidFill>
                 <a:latin typeface="맑은 고딕"/>
+                <a:ea typeface="맑은 고딕"/>
+                <a:cs typeface="맑은 고딕"/>
               </a:rPr>
               <a:t>02</a:t>
             </a:r>
@@ -10006,6 +10192,8 @@
                   <a:srgbClr val="14B8A6"/>
                 </a:solidFill>
                 <a:latin typeface="맑은 고딕"/>
+                <a:ea typeface="맑은 고딕"/>
+                <a:cs typeface="맑은 고딕"/>
               </a:rPr>
               <a:t>PART 2 · Poll SCM</a:t>
             </a:r>
@@ -10041,6 +10229,8 @@
                   <a:srgbClr val="FFFFFF"/>
                 </a:solidFill>
                 <a:latin typeface="맑은 고딕"/>
+                <a:ea typeface="맑은 고딕"/>
+                <a:cs typeface="맑은 고딕"/>
               </a:rPr>
               <a:t>Poll SCM 동작 원리</a:t>
             </a:r>
@@ -10080,6 +10270,8 @@
                   <a:srgbClr val="0D9488"/>
                 </a:solidFill>
                 <a:latin typeface="맑은 고딕"/>
+                <a:ea typeface="맑은 고딕"/>
+                <a:cs typeface="맑은 고딕"/>
               </a:rPr>
               <a:t>●  </a:t>
             </a:r>
@@ -10089,6 +10281,8 @@
                   <a:srgbClr val="222733"/>
                 </a:solidFill>
                 <a:latin typeface="맑은 고딕"/>
+                <a:ea typeface="맑은 고딕"/>
+                <a:cs typeface="맑은 고딕"/>
               </a:rPr>
               <a:t>Jenkins가 정해진 주기마다(예: 매 1분) GitHub 저장소에 '변경 사항 있어?'라고 직접 물어봄</a:t>
             </a:r>
@@ -10105,6 +10299,8 @@
                   <a:srgbClr val="0D9488"/>
                 </a:solidFill>
                 <a:latin typeface="맑은 고딕"/>
+                <a:ea typeface="맑은 고딕"/>
+                <a:cs typeface="맑은 고딕"/>
               </a:rPr>
               <a:t>●  </a:t>
             </a:r>
@@ -10114,6 +10310,8 @@
                   <a:srgbClr val="222733"/>
                 </a:solidFill>
                 <a:latin typeface="맑은 고딕"/>
+                <a:ea typeface="맑은 고딕"/>
+                <a:cs typeface="맑은 고딕"/>
               </a:rPr>
               <a:t>변경이 있으면 그때 자동으로 빌드를 시작 — 없으면 아무 일도 하지 않음</a:t>
             </a:r>
@@ -10130,6 +10328,8 @@
                   <a:srgbClr val="0D9488"/>
                 </a:solidFill>
                 <a:latin typeface="맑은 고딕"/>
+                <a:ea typeface="맑은 고딕"/>
+                <a:cs typeface="맑은 고딕"/>
               </a:rPr>
               <a:t>●  </a:t>
             </a:r>
@@ -10139,6 +10339,8 @@
                   <a:srgbClr val="222733"/>
                 </a:solidFill>
                 <a:latin typeface="맑은 고딕"/>
+                <a:ea typeface="맑은 고딕"/>
+                <a:cs typeface="맑은 고딕"/>
               </a:rPr>
               <a:t>학생 VM이 외부에서 접근 가능할 필요가 없음 — Jenkins가 나가서 확인하는 구조라 NAT 문제 없음</a:t>
             </a:r>
@@ -10174,6 +10376,8 @@
                   <a:srgbClr val="14213D"/>
                 </a:solidFill>
                 <a:latin typeface="맑은 고딕"/>
+                <a:ea typeface="맑은 고딕"/>
+                <a:cs typeface="맑은 고딕"/>
               </a:rPr>
               <a:t>Poll SCM 흐름</a:t>
             </a:r>
@@ -10253,6 +10457,8 @@
                   <a:srgbClr val="FFFFFF"/>
                 </a:solidFill>
                 <a:latin typeface="맑은 고딕"/>
+                <a:ea typeface="맑은 고딕"/>
+                <a:cs typeface="맑은 고딕"/>
               </a:rPr>
               <a:t>Jenkins(1분마다) → GitHub "변경됐어?" → (Yes면) 자동 빌드 시작</a:t>
             </a:r>
@@ -10288,6 +10494,8 @@
                   <a:srgbClr val="5B6373"/>
                 </a:solidFill>
                 <a:latin typeface="맑은 고딕"/>
+                <a:ea typeface="맑은 고딕"/>
+                <a:cs typeface="맑은 고딕"/>
               </a:rPr>
               <a:t>클라우드인프라관리  ·  12주차 3차시</a:t>
             </a:r>
@@ -10323,6 +10531,8 @@
                   <a:srgbClr val="5B6373"/>
                 </a:solidFill>
                 <a:latin typeface="맑은 고딕"/>
+                <a:ea typeface="맑은 고딕"/>
+                <a:cs typeface="맑은 고딕"/>
               </a:rPr>
               <a:t>08 / 13</a:t>
             </a:r>
@@ -10526,6 +10736,8 @@
                   <a:srgbClr val="14213D"/>
                 </a:solidFill>
                 <a:latin typeface="맑은 고딕"/>
+                <a:ea typeface="맑은 고딕"/>
+                <a:cs typeface="맑은 고딕"/>
               </a:rPr>
               <a:t>02</a:t>
             </a:r>
@@ -10561,6 +10773,8 @@
                   <a:srgbClr val="14B8A6"/>
                 </a:solidFill>
                 <a:latin typeface="맑은 고딕"/>
+                <a:ea typeface="맑은 고딕"/>
+                <a:cs typeface="맑은 고딕"/>
               </a:rPr>
               <a:t>PART 2 · Poll SCM</a:t>
             </a:r>
@@ -10596,6 +10810,8 @@
                   <a:srgbClr val="FFFFFF"/>
                 </a:solidFill>
                 <a:latin typeface="맑은 고딕"/>
+                <a:ea typeface="맑은 고딕"/>
+                <a:cs typeface="맑은 고딕"/>
               </a:rPr>
               <a:t>Job 설정에서 Poll SCM 켜기</a:t>
             </a:r>
@@ -10635,6 +10851,8 @@
                   <a:srgbClr val="0D9488"/>
                 </a:solidFill>
                 <a:latin typeface="맑은 고딕"/>
+                <a:ea typeface="맑은 고딕"/>
+                <a:cs typeface="맑은 고딕"/>
               </a:rPr>
               <a:t>●  </a:t>
             </a:r>
@@ -10644,6 +10862,8 @@
                   <a:srgbClr val="222733"/>
                 </a:solidFill>
                 <a:latin typeface="맑은 고딕"/>
+                <a:ea typeface="맑은 고딕"/>
+                <a:cs typeface="맑은 고딕"/>
               </a:rPr>
               <a:t>Job 설정 화면 → Build Triggers → 'Poll SCM' 체크</a:t>
             </a:r>
@@ -10660,6 +10880,8 @@
                   <a:srgbClr val="0D9488"/>
                 </a:solidFill>
                 <a:latin typeface="맑은 고딕"/>
+                <a:ea typeface="맑은 고딕"/>
+                <a:cs typeface="맑은 고딕"/>
               </a:rPr>
               <a:t>●  </a:t>
             </a:r>
@@ -10669,6 +10891,8 @@
                   <a:srgbClr val="222733"/>
                 </a:solidFill>
                 <a:latin typeface="맑은 고딕"/>
+                <a:ea typeface="맑은 고딕"/>
+                <a:cs typeface="맑은 고딕"/>
               </a:rPr>
               <a:t>Schedule란에 cron 형식으로 * * * * * 입력(매 1분마다 확인)</a:t>
             </a:r>
@@ -10685,6 +10909,8 @@
                   <a:srgbClr val="0D9488"/>
                 </a:solidFill>
                 <a:latin typeface="맑은 고딕"/>
+                <a:ea typeface="맑은 고딕"/>
+                <a:cs typeface="맑은 고딕"/>
               </a:rPr>
               <a:t>●  </a:t>
             </a:r>
@@ -10694,6 +10920,8 @@
                   <a:srgbClr val="222733"/>
                 </a:solidFill>
                 <a:latin typeface="맑은 고딕"/>
+                <a:ea typeface="맑은 고딕"/>
+                <a:cs typeface="맑은 고딕"/>
               </a:rPr>
               <a:t>저장 후 GitHub에 아무 변경 없이 기다리면 — 빌드가 실행되지 않음(정상)</a:t>
             </a:r>
@@ -10710,6 +10938,8 @@
                   <a:srgbClr val="0D9488"/>
                 </a:solidFill>
                 <a:latin typeface="맑은 고딕"/>
+                <a:ea typeface="맑은 고딕"/>
+                <a:cs typeface="맑은 고딕"/>
               </a:rPr>
               <a:t>●  </a:t>
             </a:r>
@@ -10719,6 +10949,8 @@
                   <a:srgbClr val="222733"/>
                 </a:solidFill>
                 <a:latin typeface="맑은 고딕"/>
+                <a:ea typeface="맑은 고딕"/>
+                <a:cs typeface="맑은 고딕"/>
               </a:rPr>
               <a:t>코드를 수정하고 git push하면 — 수 초~1분 내 자동으로 빌드가 시작됨(검증 완료)</a:t>
             </a:r>
@@ -10754,6 +10986,8 @@
                   <a:srgbClr val="5B6373"/>
                 </a:solidFill>
                 <a:latin typeface="맑은 고딕"/>
+                <a:ea typeface="맑은 고딕"/>
+                <a:cs typeface="맑은 고딕"/>
               </a:rPr>
               <a:t>클라우드인프라관리  ·  12주차 3차시</a:t>
             </a:r>
@@ -10789,6 +11023,8 @@
                   <a:srgbClr val="5B6373"/>
                 </a:solidFill>
                 <a:latin typeface="맑은 고딕"/>
+                <a:ea typeface="맑은 고딕"/>
+                <a:cs typeface="맑은 고딕"/>
               </a:rPr>
               <a:t>09 / 13</a:t>
             </a:r>
